--- a/library/lectures/lec-06/rendered/lec-06.pptx
+++ b/library/lectures/lec-06/rendered/lec-06.pptx
@@ -7455,7 +7455,7 @@
                 </a:solidFill>
                 <a:latin typeface="Arial"/>
               </a:rPr>
-              <a:t>Это родословная идеи (логический порядок), а не хронология: сначала интуиция Мичелла, затем — что алгоритм у неё старый, Коши.</a:t>
+              <a:t>Это родословная (логический порядок), а не хронология: постановка Мичелла (1904) — основа; алгоритм Коши (1847) старше по дате, но применяется к ней позже.</a:t>
             </a:r>
           </a:p>
         </p:txBody>
